--- a/docs/content/getting_started/getting_started_activity.pptx
+++ b/docs/content/getting_started/getting_started_activity.pptx
@@ -3311,7 +3311,7 @@
             </a:pPr>
             <a:r>
               <a:rPr/>
-              <a:t>Getting Started</a:t>
+              <a:t>Activity: Getting Started</a:t>
             </a:r>
           </a:p>
         </p:txBody>
@@ -8822,7 +8822,7 @@
             </a:pPr>
             <a:r>
               <a:rPr/>
-              <a:t>Worksheet 1: Getting Started</a:t>
+              <a:t>Worksheet: Getting Started</a:t>
             </a:r>
           </a:p>
         </p:txBody>
@@ -9322,7 +9322,7 @@
             </a:r>
             <a:r>
               <a:rPr sz="2000"/>
-              <a:t> Leave this copy alone — it is raw data. We will read it but never overwrite it. (Your own field data will get cleaned up and added here starting in Module 2.)</a:t>
+              <a:t> Leave this copy alone — it is raw data. We will read it but never overwrite it. (Your own field data will get cleaned up and added here starting in Wrangling Your Data.)</a:t>
             </a:r>
           </a:p>
           <a:p>

--- a/docs/content/getting_started/getting_started_activity.pptx
+++ b/docs/content/getting_started/getting_started_activity.pptx
@@ -8056,7 +8056,7 @@
                 </a:solidFill>
                 <a:latin typeface="Courier"/>
               </a:rPr>
-              <a:t>"steelblue"</a:t>
+              <a:t>"darkblue"</a:t>
             </a:r>
             <a:r>
               <a:rPr>

--- a/docs/content/getting_started/getting_started_activity.pptx
+++ b/docs/content/getting_started/getting_started_activity.pptx
@@ -4196,7 +4196,7 @@
               <a:rPr>
                 <a:latin typeface="Courier"/>
               </a:rPr>
-              <a:t>_____</a:t>
+              <a:t>_______________</a:t>
             </a:r>
           </a:p>
           <a:p>
@@ -9487,7 +9487,8 @@
                 <a:latin typeface="Courier"/>
               </a:rPr>
               <a:t>H0:
-Ha:</a:t>
+Ha:
+</a:t>
             </a:r>
           </a:p>
           <a:p>
@@ -9697,7 +9698,7 @@
             </a:r>
             <a:r>
               <a:rPr/>
-              <a:t>. Inside it, create three sub-folders:</a:t>
+              <a:t>. Inside it, create four sub-folders:</a:t>
             </a:r>
           </a:p>
           <a:p>
@@ -9711,7 +9712,8 @@
               <a:t>pine_project/
 ├── data/       ← your CSV and Excel files go here
 ├── scripts/    ← your .R code goes here
-└── figures/    ← plots you save go here</a:t>
+├── figures/    ← plots you save go here
+└── output/    ← place to save modified dataframes</a:t>
             </a:r>
           </a:p>
           <a:p>
@@ -9784,13 +9786,18 @@
             </a:r>
             <a:r>
               <a:rPr/>
-              <a:t> folder: </a:t>
-            </a:r>
-            <a:r>
-              <a:rPr>
-                <a:latin typeface="Courier"/>
-              </a:rPr>
-              <a:t>________________________</a:t>
+              <a:t> folder:</a:t>
+            </a:r>
+          </a:p>
+          <a:p>
+            <a:pPr lvl="0" indent="0" marL="0">
+              <a:buNone/>
+            </a:pPr>
+            <a:r>
+              <a:rPr>
+                <a:latin typeface="Courier"/>
+              </a:rPr>
+              <a:t>_________________________________________________________________________________________________________________________________________________________________</a:t>
             </a:r>
           </a:p>
         </p:txBody>
@@ -9914,7 +9921,7 @@
             </a:r>
             <a:r>
               <a:rPr/>
-              <a:t> way (no spaces, no units hidden in the text):</a:t>
+              <a:t> way (no spaces, no units hidden in the text): what will they be?</a:t>
             </a:r>
           </a:p>
         </p:txBody>
@@ -9940,8 +9947,9 @@
                 <a:tableStyleId>{5C22544A-7EE6-4342-B048-85BDC9FD1C3A}</a:tableStyleId>
               </a:tblPr>
               <a:tblGrid>
-                <a:gridCol w="2616200"/>
-                <a:gridCol w="2616200"/>
+                <a:gridCol w="1739900"/>
+                <a:gridCol w="1739900"/>
+                <a:gridCol w="1739900"/>
               </a:tblGrid>
               <a:tr h="0">
                 <a:tc>
@@ -9970,6 +9978,22 @@
                       </a:pPr>
                       <a:r>
                         <a:rPr/>
+                        <a:t>units?</a:t>
+                      </a:r>
+                    </a:p>
+                  </a:txBody>
+                  <a:tcPr/>
+                </a:tc>
+                <a:tc>
+                  <a:txBody>
+                    <a:bodyPr/>
+                    <a:lstStyle/>
+                    <a:p>
+                      <a:pPr lvl="0" indent="0" marL="0">
+                        <a:buNone/>
+                      </a:pPr>
+                      <a:r>
+                        <a:rPr/>
                         <a:t>What goes in it</a:t>
                       </a:r>
                     </a:p>
@@ -9983,15 +10007,7 @@
                     <a:bodyPr/>
                     <a:lstStyle/>
                     <a:p>
-                      <a:pPr lvl="0" indent="0" marL="0">
-                        <a:buNone/>
-                      </a:pPr>
-                      <a:r>
-                        <a:rPr>
-                          <a:latin typeface="Courier"/>
-                        </a:rPr>
-                        <a:t>date</a:t>
-                      </a:r>
+                      <a:endParaRPr/>
                     </a:p>
                   </a:txBody>
                 </a:tc>
@@ -10000,13 +10016,16 @@
                     <a:bodyPr/>
                     <a:lstStyle/>
                     <a:p>
-                      <a:pPr lvl="0" indent="0" marL="0">
-                        <a:buNone/>
-                      </a:pPr>
-                      <a:r>
-                        <a:rPr/>
-                        <a:t>the date you collected, one format for everyone</a:t>
-                      </a:r>
+                      <a:endParaRPr/>
+                    </a:p>
+                  </a:txBody>
+                </a:tc>
+                <a:tc>
+                  <a:txBody>
+                    <a:bodyPr/>
+                    <a:lstStyle/>
+                    <a:p>
+                      <a:endParaRPr/>
                     </a:p>
                   </a:txBody>
                 </a:tc>
@@ -10017,15 +10036,7 @@
                     <a:bodyPr/>
                     <a:lstStyle/>
                     <a:p>
-                      <a:pPr lvl="0" indent="0" marL="0">
-                        <a:buNone/>
-                      </a:pPr>
-                      <a:r>
-                        <a:rPr>
-                          <a:latin typeface="Courier"/>
-                        </a:rPr>
-                        <a:t>group</a:t>
-                      </a:r>
+                      <a:endParaRPr/>
                     </a:p>
                   </a:txBody>
                 </a:tc>
@@ -10034,13 +10045,16 @@
                     <a:bodyPr/>
                     <a:lstStyle/>
                     <a:p>
-                      <a:pPr lvl="0" indent="0" marL="0">
-                        <a:buNone/>
-                      </a:pPr>
-                      <a:r>
-                        <a:rPr/>
-                        <a:t>your field team’s name</a:t>
-                      </a:r>
+                      <a:endParaRPr/>
+                    </a:p>
+                  </a:txBody>
+                </a:tc>
+                <a:tc>
+                  <a:txBody>
+                    <a:bodyPr/>
+                    <a:lstStyle/>
+                    <a:p>
+                      <a:endParaRPr/>
                     </a:p>
                   </a:txBody>
                 </a:tc>
@@ -10051,15 +10065,7 @@
                     <a:bodyPr/>
                     <a:lstStyle/>
                     <a:p>
-                      <a:pPr lvl="0" indent="0" marL="0">
-                        <a:buNone/>
-                      </a:pPr>
-                      <a:r>
-                        <a:rPr>
-                          <a:latin typeface="Courier"/>
-                        </a:rPr>
-                        <a:t>n_s</a:t>
-                      </a:r>
+                      <a:endParaRPr/>
                     </a:p>
                   </a:txBody>
                 </a:tc>
@@ -10068,29 +10074,16 @@
                     <a:bodyPr/>
                     <a:lstStyle/>
                     <a:p>
-                      <a:pPr lvl="0" indent="0" marL="0">
-                        <a:buNone/>
-                      </a:pPr>
-                      <a:r>
-                        <a:rPr>
-                          <a:latin typeface="Courier"/>
-                        </a:rPr>
-                        <a:t>n</a:t>
-                      </a:r>
-                      <a:r>
-                        <a:rPr/>
-                        <a:t> or </a:t>
-                      </a:r>
-                      <a:r>
-                        <a:rPr>
-                          <a:latin typeface="Courier"/>
-                        </a:rPr>
-                        <a:t>s</a:t>
-                      </a:r>
-                      <a:r>
-                        <a:rPr/>
-                        <a:t> — which compass side</a:t>
-                      </a:r>
+                      <a:endParaRPr/>
+                    </a:p>
+                  </a:txBody>
+                </a:tc>
+                <a:tc>
+                  <a:txBody>
+                    <a:bodyPr/>
+                    <a:lstStyle/>
+                    <a:p>
+                      <a:endParaRPr/>
                     </a:p>
                   </a:txBody>
                 </a:tc>
@@ -10101,15 +10094,7 @@
                     <a:bodyPr/>
                     <a:lstStyle/>
                     <a:p>
-                      <a:pPr lvl="0" indent="0" marL="0">
-                        <a:buNone/>
-                      </a:pPr>
-                      <a:r>
-                        <a:rPr>
-                          <a:latin typeface="Courier"/>
-                        </a:rPr>
-                        <a:t>sun</a:t>
-                      </a:r>
+                      <a:endParaRPr/>
                     </a:p>
                   </a:txBody>
                 </a:tc>
@@ -10118,29 +10103,16 @@
                     <a:bodyPr/>
                     <a:lstStyle/>
                     <a:p>
-                      <a:pPr lvl="0" indent="0" marL="0">
-                        <a:buNone/>
-                      </a:pPr>
-                      <a:r>
-                        <a:rPr>
-                          <a:latin typeface="Courier"/>
-                        </a:rPr>
-                        <a:t>shady</a:t>
-                      </a:r>
-                      <a:r>
-                        <a:rPr/>
-                        <a:t> or </a:t>
-                      </a:r>
-                      <a:r>
-                        <a:rPr>
-                          <a:latin typeface="Courier"/>
-                        </a:rPr>
-                        <a:t>sunny</a:t>
-                      </a:r>
-                      <a:r>
-                        <a:rPr/>
-                        <a:t> — light exposure</a:t>
-                      </a:r>
+                      <a:endParaRPr/>
+                    </a:p>
+                  </a:txBody>
+                </a:tc>
+                <a:tc>
+                  <a:txBody>
+                    <a:bodyPr/>
+                    <a:lstStyle/>
+                    <a:p>
+                      <a:endParaRPr/>
                     </a:p>
                   </a:txBody>
                 </a:tc>
@@ -10151,15 +10123,7 @@
                     <a:bodyPr/>
                     <a:lstStyle/>
                     <a:p>
-                      <a:pPr lvl="0" indent="0" marL="0">
-                        <a:buNone/>
-                      </a:pPr>
-                      <a:r>
-                        <a:rPr>
-                          <a:latin typeface="Courier"/>
-                        </a:rPr>
-                        <a:t>tree_no</a:t>
-                      </a:r>
+                      <a:endParaRPr/>
                     </a:p>
                   </a:txBody>
                 </a:tc>
@@ -10168,13 +10132,16 @@
                     <a:bodyPr/>
                     <a:lstStyle/>
                     <a:p>
-                      <a:pPr lvl="0" indent="0" marL="0">
-                        <a:buNone/>
-                      </a:pPr>
-                      <a:r>
-                        <a:rPr/>
-                        <a:t>which tree, as a number</a:t>
-                      </a:r>
+                      <a:endParaRPr/>
+                    </a:p>
+                  </a:txBody>
+                </a:tc>
+                <a:tc>
+                  <a:txBody>
+                    <a:bodyPr/>
+                    <a:lstStyle/>
+                    <a:p>
+                      <a:endParaRPr/>
                     </a:p>
                   </a:txBody>
                 </a:tc>
@@ -10185,15 +10152,7 @@
                     <a:bodyPr/>
                     <a:lstStyle/>
                     <a:p>
-                      <a:pPr lvl="0" indent="0" marL="0">
-                        <a:buNone/>
-                      </a:pPr>
-                      <a:r>
-                        <a:rPr>
-                          <a:latin typeface="Courier"/>
-                        </a:rPr>
-                        <a:t>length_mm</a:t>
-                      </a:r>
+                      <a:endParaRPr/>
                     </a:p>
                   </a:txBody>
                 </a:tc>
@@ -10202,13 +10161,74 @@
                     <a:bodyPr/>
                     <a:lstStyle/>
                     <a:p>
-                      <a:pPr lvl="0" indent="0" marL="0">
-                        <a:buNone/>
-                      </a:pPr>
-                      <a:r>
-                        <a:rPr/>
-                        <a:t>the needle length, in millimeters, numbers only</a:t>
-                      </a:r>
+                      <a:endParaRPr/>
+                    </a:p>
+                  </a:txBody>
+                </a:tc>
+                <a:tc>
+                  <a:txBody>
+                    <a:bodyPr/>
+                    <a:lstStyle/>
+                    <a:p>
+                      <a:endParaRPr/>
+                    </a:p>
+                  </a:txBody>
+                </a:tc>
+              </a:tr>
+              <a:tr h="0">
+                <a:tc>
+                  <a:txBody>
+                    <a:bodyPr/>
+                    <a:lstStyle/>
+                    <a:p>
+                      <a:endParaRPr/>
+                    </a:p>
+                  </a:txBody>
+                </a:tc>
+                <a:tc>
+                  <a:txBody>
+                    <a:bodyPr/>
+                    <a:lstStyle/>
+                    <a:p>
+                      <a:endParaRPr/>
+                    </a:p>
+                  </a:txBody>
+                </a:tc>
+                <a:tc>
+                  <a:txBody>
+                    <a:bodyPr/>
+                    <a:lstStyle/>
+                    <a:p>
+                      <a:endParaRPr/>
+                    </a:p>
+                  </a:txBody>
+                </a:tc>
+              </a:tr>
+              <a:tr h="0">
+                <a:tc>
+                  <a:txBody>
+                    <a:bodyPr/>
+                    <a:lstStyle/>
+                    <a:p>
+                      <a:endParaRPr/>
+                    </a:p>
+                  </a:txBody>
+                </a:tc>
+                <a:tc>
+                  <a:txBody>
+                    <a:bodyPr/>
+                    <a:lstStyle/>
+                    <a:p>
+                      <a:endParaRPr/>
+                    </a:p>
+                  </a:txBody>
+                </a:tc>
+                <a:tc>
+                  <a:txBody>
+                    <a:bodyPr/>
+                    <a:lstStyle/>
+                    <a:p>
+                      <a:endParaRPr/>
                     </a:p>
                   </a:txBody>
                 </a:tc>
@@ -10564,17 +10584,23 @@
               <a:rPr>
                 <a:latin typeface="Courier"/>
               </a:rPr>
-              <a:t>___</a:t>
-            </a:r>
-            <a:r>
-              <a:rPr/>
-              <a:t> needles per side, per tree, on </a:t>
-            </a:r>
-            <a:r>
-              <a:rPr>
-                <a:latin typeface="Courier"/>
-              </a:rPr>
-              <a:t>___</a:t>
+              <a:t>______________</a:t>
+            </a:r>
+            <a:r>
+              <a:rPr/>
+              <a:t> needles per</a:t>
+            </a:r>
+            <a:br/>
+            <a:br/>
+            <a:r>
+              <a:rPr/>
+              <a:t>side, per tree, on </a:t>
+            </a:r>
+            <a:r>
+              <a:rPr>
+                <a:latin typeface="Courier"/>
+              </a:rPr>
+              <a:t>_____________</a:t>
             </a:r>
             <a:r>
               <a:rPr/>
@@ -10822,13 +10848,16 @@
             </a:r>
             <a:r>
               <a:rPr/>
-              <a:t>? </a:t>
-            </a:r>
-            <a:r>
-              <a:rPr>
-                <a:latin typeface="Courier"/>
-              </a:rPr>
-              <a:t>________________________</a:t>
+              <a:t>?</a:t>
+            </a:r>
+            <a:br/>
+            <a:br/>
+            <a:br/>
+            <a:r>
+              <a:rPr>
+                <a:latin typeface="Courier"/>
+              </a:rPr>
+              <a:t>______________________________________________________________________________________</a:t>
             </a:r>
           </a:p>
         </p:txBody>
@@ -11264,7 +11293,7 @@
               <a:rPr>
                 <a:latin typeface="Courier"/>
               </a:rPr>
-              <a:t>_____</a:t>
+              <a:t>_____________</a:t>
             </a:r>
           </a:p>
         </p:txBody>
@@ -11814,7 +11843,7 @@
               <a:rPr>
                 <a:latin typeface="Courier"/>
               </a:rPr>
-              <a:t>_____</a:t>
+              <a:t>__________________</a:t>
             </a:r>
           </a:p>
           <a:p>
